--- a/docs/Feature-Cost-Shared-vs-Duplicated.pptx
+++ b/docs/Feature-Cost-Shared-vs-Duplicated.pptx
@@ -3256,7 +3256,7 @@
               </a:defRPr>
             </a:pPr>
             <a:r>
-              <a:t>Key conclusions from the analysis</a:t>
+              <a:t>Key conclusions from the cost model</a:t>
             </a:r>
           </a:p>
         </p:txBody>
@@ -3359,7 +3359,7 @@
               </a:defRPr>
             </a:pPr>
             <a:r>
-              <a:t>TECHNICAL DEBT</a:t>
+              <a:t>MEASURED VS ASSUMED</a:t>
             </a:r>
           </a:p>
         </p:txBody>
@@ -3393,7 +3393,7 @@
               </a:defRPr>
             </a:pPr>
             <a:r>
-              <a:t>Duplication fuels the debt</a:t>
+              <a:t>Where the numbers come from</a:t>
             </a:r>
           </a:p>
         </p:txBody>
@@ -3470,7 +3470,7 @@
               </a:defRPr>
             </a:pPr>
             <a:r>
-              <a:t>42%</a:t>
+              <a:t>4 / 7</a:t>
             </a:r>
           </a:p>
         </p:txBody>
@@ -3504,15 +3504,15 @@
               </a:defRPr>
             </a:pPr>
             <a:r>
-              <a:t>of dev time is lost</a:t>
+              <a:t>model factors</a:t>
             </a:r>
             <a:br/>
             <a:r>
-              <a:t>to technical debt</a:t>
+              <a:t>rest on published</a:t>
             </a:r>
             <a:br/>
             <a:r>
-              <a:t>and poor quality code</a:t>
+              <a:t>measurements</a:t>
             </a:r>
           </a:p>
         </p:txBody>
@@ -3546,7 +3546,7 @@
               </a:defRPr>
             </a:pPr>
             <a:r>
-              <a:t>Stripe Developer Coefficient, 2018</a:t>
+              <a:t>COCOMO II, Krüger &amp; Berger 2020</a:t>
             </a:r>
           </a:p>
         </p:txBody>
@@ -3623,7 +3623,7 @@
               </a:defRPr>
             </a:pPr>
             <a:r>
-              <a:t>Duplication = debt accelerator</a:t>
+              <a:t>Assumptions (no solid data)</a:t>
             </a:r>
           </a:p>
         </p:txBody>
@@ -3657,7 +3657,7 @@
               </a:defRPr>
             </a:pPr>
             <a:r>
-              <a:t>›  Divergence factor increases over time (1.0 → 3.0-5.0 after 2 years)</a:t>
+              <a:t>›  Extra-copy upkeep e0 = 1.0 × the first copy (hint: Ray &amp; Kim 2012)</a:t>
             </a:r>
           </a:p>
         </p:txBody>
@@ -3691,7 +3691,7 @@
               </a:defRPr>
             </a:pPr>
             <a:r>
-              <a:t>›  Code churn doubles, increasing bug probability</a:t>
+              <a:t>›  Drift +0.05/yr, capped at 1.5× — not exponential</a:t>
             </a:r>
           </a:p>
         </p:txBody>
@@ -3725,7 +3725,7 @@
               </a:defRPr>
             </a:pPr>
             <a:r>
-              <a:t>›  Cost to the US economy: $2.41 trillion (CISQ 2022)</a:t>
+              <a:t>›  Coordination + upgrades: 4%/yr of build cost per extra app</a:t>
             </a:r>
           </a:p>
         </p:txBody>
@@ -3759,7 +3759,7 @@
               </a:defRPr>
             </a:pPr>
             <a:r>
-              <a:t>›  Target: Technical Debt Ratio ≤ 5% — duplication blows up this ratio</a:t>
+              <a:t>›  New library: 280 h setup, 100 h/yr running</a:t>
             </a:r>
           </a:p>
         </p:txBody>
@@ -3836,7 +3836,7 @@
               </a:defRPr>
             </a:pPr>
             <a:r>
-              <a:t>Bug cost by detection phase</a:t>
+              <a:t>Measured factors (published ranges)</a:t>
             </a:r>
           </a:p>
         </p:txBody>
@@ -3870,7 +3870,7 @@
               </a:defRPr>
             </a:pPr>
             <a:r>
-              <a:t>Design</a:t>
+              <a:t>Generalization</a:t>
             </a:r>
           </a:p>
         </p:txBody>
@@ -3904,7 +3904,7 @@
               </a:defRPr>
             </a:pPr>
             <a:r>
-              <a:t>1x</a:t>
+              <a:t>×1.2</a:t>
             </a:r>
           </a:p>
         </p:txBody>
@@ -3938,7 +3938,7 @@
               </a:defRPr>
             </a:pPr>
             <a:r>
-              <a:t>Implementation</a:t>
+              <a:t>Porting</a:t>
             </a:r>
           </a:p>
         </p:txBody>
@@ -3972,7 +3972,7 @@
               </a:defRPr>
             </a:pPr>
             <a:r>
-              <a:t>3-5x</a:t>
+              <a:t>×0.65</a:t>
             </a:r>
           </a:p>
         </p:txBody>
@@ -4006,7 +4006,7 @@
               </a:defRPr>
             </a:pPr>
             <a:r>
-              <a:t>QA / Testing</a:t>
+              <a:t>Integration</a:t>
             </a:r>
           </a:p>
         </p:txBody>
@@ -4040,7 +4040,7 @@
               </a:defRPr>
             </a:pPr>
             <a:r>
-              <a:t>5-10x</a:t>
+              <a:t>×0.2</a:t>
             </a:r>
           </a:p>
         </p:txBody>
@@ -4074,7 +4074,7 @@
               </a:defRPr>
             </a:pPr>
             <a:r>
-              <a:t>Production</a:t>
+              <a:t>Upkeep / year</a:t>
             </a:r>
           </a:p>
         </p:txBody>
@@ -4108,7 +4108,7 @@
               </a:defRPr>
             </a:pPr>
             <a:r>
-              <a:t>10-30x</a:t>
+              <a:t>20%</a:t>
             </a:r>
           </a:p>
         </p:txBody>
@@ -4142,7 +4142,7 @@
               </a:defRPr>
             </a:pPr>
             <a:r>
-              <a:t>With duplication, production bugs potentially affect 2 codebases → further amplified cost</a:t>
+              <a:t>Bugs aren't priced on their own: the 1-10-100 rule isn't supported by data (Menzies et al. 2017)</a:t>
             </a:r>
           </a:p>
         </p:txBody>
@@ -4279,7 +4279,7 @@
               </a:defRPr>
             </a:pPr>
             <a:r>
-              <a:t>Global comparison</a:t>
+              <a:t>Global comparison (% of build cost)</a:t>
             </a:r>
           </a:p>
         </p:txBody>
@@ -4673,7 +4673,7 @@
               </a:defRPr>
             </a:pPr>
             <a:r>
-              <a:t>Initial cost</a:t>
+              <a:t>Up-front cost</a:t>
             </a:r>
           </a:p>
         </p:txBody>
@@ -4707,7 +4707,7 @@
               </a:defRPr>
             </a:pPr>
             <a:r>
-              <a:t>+30-50%</a:t>
+              <a:t>120% + 20% per extra app + setup</a:t>
             </a:r>
           </a:p>
         </p:txBody>
@@ -4741,7 +4741,7 @@
               </a:defRPr>
             </a:pPr>
             <a:r>
-              <a:t>~170-220% of one feature</a:t>
+              <a:t>100% + 65% per extra copy</a:t>
             </a:r>
           </a:p>
         </p:txBody>
@@ -4904,7 +4904,7 @@
               </a:defRPr>
             </a:pPr>
             <a:r>
-              <a:t>Annual maintenance</a:t>
+              <a:t>Yearly upkeep</a:t>
             </a:r>
           </a:p>
         </p:txBody>
@@ -4938,7 +4938,7 @@
               </a:defRPr>
             </a:pPr>
             <a:r>
-              <a:t>15-25% of initial dev</a:t>
+              <a:t>24% + 4% per extra app</a:t>
             </a:r>
           </a:p>
         </p:txBody>
@@ -4972,7 +4972,7 @@
               </a:defRPr>
             </a:pPr>
             <a:r>
-              <a:t>30-50% (doubled)</a:t>
+              <a:t>20% + ~20% per extra copy, rising</a:t>
             </a:r>
           </a:p>
         </p:txBody>
@@ -5135,7 +5135,7 @@
               </a:defRPr>
             </a:pPr>
             <a:r>
-              <a:t>Bug risk</a:t>
+              <a:t>Bug fixes</a:t>
             </a:r>
           </a:p>
         </p:txBody>
@@ -5169,7 +5169,7 @@
               </a:defRPr>
             </a:pPr>
             <a:r>
-              <a:t>1x (single source)</a:t>
+              <a:t>Once, in one place</a:t>
             </a:r>
           </a:p>
         </p:txBody>
@@ -5203,7 +5203,7 @@
               </a:defRPr>
             </a:pPr>
             <a:r>
-              <a:t>33% propagated bugs</a:t>
+              <a:t>In every copy (inside upkeep)</a:t>
             </a:r>
           </a:p>
         </p:txBody>
@@ -5366,7 +5366,7 @@
               </a:defRPr>
             </a:pPr>
             <a:r>
-              <a:t>UX Consistency</a:t>
+              <a:t>Consistency</a:t>
             </a:r>
           </a:p>
         </p:txBody>
@@ -5400,7 +5400,7 @@
               </a:defRPr>
             </a:pPr>
             <a:r>
-              <a:t>Guaranteed</a:t>
+              <a:t>Same code, same behavior</a:t>
             </a:r>
           </a:p>
         </p:txBody>
@@ -5434,7 +5434,7 @@
               </a:defRPr>
             </a:pPr>
             <a:r>
-              <a:t>Degrades over time</a:t>
+              <a:t>Can drift (sometimes on purpose)</a:t>
             </a:r>
           </a:p>
         </p:txBody>
@@ -5597,7 +5597,7 @@
               </a:defRPr>
             </a:pPr>
             <a:r>
-              <a:t>Scalability (N codebases)</a:t>
+              <a:t>Each extra app</a:t>
             </a:r>
           </a:p>
         </p:txBody>
@@ -5631,7 +5631,7 @@
               </a:defRPr>
             </a:pPr>
             <a:r>
-              <a:t>Excellent (linear)</a:t>
+              <a:t>Cheap</a:t>
             </a:r>
           </a:p>
         </p:txBody>
@@ -5665,7 +5665,7 @@
               </a:defRPr>
             </a:pPr>
             <a:r>
-              <a:t>Poor (N × cost)</a:t>
+              <a:t>Expensive</a:t>
             </a:r>
           </a:p>
         </p:txBody>
@@ -5862,7 +5862,7 @@
               </a:defRPr>
             </a:pPr>
             <a:r>
-              <a:t>6-18 months</a:t>
+              <a:t>Day one (reference case)</a:t>
             </a:r>
           </a:p>
         </p:txBody>
@@ -5896,7 +5896,7 @@
               </a:defRPr>
             </a:pPr>
             <a:r>
-              <a:t>Never (rising costs)</a:t>
+              <a:t>Wins for small, short-lived features</a:t>
             </a:r>
           </a:p>
         </p:txBody>
@@ -6059,7 +6059,7 @@
               </a:defRPr>
             </a:pPr>
             <a:r>
-              <a:t>Onboarding</a:t>
+              <a:t>Main risk</a:t>
             </a:r>
           </a:p>
         </p:txBody>
@@ -6093,7 +6093,7 @@
               </a:defRPr>
             </a:pPr>
             <a:r>
-              <a:t>Simple (1 source)</a:t>
+              <a:t>Wrong abstraction, breaking changes</a:t>
             </a:r>
           </a:p>
         </p:txBody>
@@ -6127,7 +6127,7 @@
               </a:defRPr>
             </a:pPr>
             <a:r>
-              <a:t>Complex (N sources)</a:t>
+              <a:t>Missed fixes, drift</a:t>
             </a:r>
           </a:p>
         </p:txBody>
@@ -6418,7 +6418,7 @@
               </a:defRPr>
             </a:pPr>
             <a:r>
-              <a:t>✓  Feature lifespan &gt; 18 months</a:t>
+              <a:t>✓  3+ apps need it (or are planned)</a:t>
             </a:r>
           </a:p>
         </p:txBody>
@@ -6452,7 +6452,7 @@
               </a:defRPr>
             </a:pPr>
             <a:r>
-              <a:t>✓  High frequency of evolution</a:t>
+              <a:t>✓  Large feature (&gt; ~800 h for 2 apps)</a:t>
             </a:r>
           </a:p>
         </p:txBody>
@@ -6486,7 +6486,7 @@
               </a:defRPr>
             </a:pPr>
             <a:r>
-              <a:t>✓  3+ consumer codebases (or planned)</a:t>
+              <a:t>✓  Horizon of several years</a:t>
             </a:r>
           </a:p>
         </p:txBody>
@@ -6520,7 +6520,7 @@
               </a:defRPr>
             </a:pPr>
             <a:r>
-              <a:t>✓  UX consistency is critical</a:t>
+              <a:t>✓  A shared library already exists</a:t>
             </a:r>
           </a:p>
         </p:txBody>
@@ -6554,7 +6554,7 @@
               </a:defRPr>
             </a:pPr>
             <a:r>
-              <a:t>✓  Team can invest in initial setup</a:t>
+              <a:t>✓  The apps should behave the same</a:t>
             </a:r>
           </a:p>
         </p:txBody>
@@ -6588,7 +6588,7 @@
               </a:defRPr>
             </a:pPr>
             <a:r>
-              <a:t>✓  System is growing</a:t>
+              <a:t>✓  Generalization is cheap (G ≤ ~1.3)</a:t>
             </a:r>
           </a:p>
         </p:txBody>
@@ -6708,7 +6708,7 @@
               </a:defRPr>
             </a:pPr>
             <a:r>
-              <a:t>Duplication may work if:</a:t>
+              <a:t>Copying may be better if:</a:t>
             </a:r>
           </a:p>
         </p:txBody>
@@ -6742,7 +6742,7 @@
               </a:defRPr>
             </a:pPr>
             <a:r>
-              <a:t>›  Short-lived feature (&lt; 6 months)</a:t>
+              <a:t>›  Small feature or short horizon</a:t>
             </a:r>
           </a:p>
         </p:txBody>
@@ -6776,7 +6776,7 @@
               </a:defRPr>
             </a:pPr>
             <a:r>
-              <a:t>›  Very few evolutions expected</a:t>
+              <a:t>›  A new library just for this feature</a:t>
             </a:r>
           </a:p>
         </p:txBody>
@@ -6810,7 +6810,7 @@
               </a:defRPr>
             </a:pPr>
             <a:r>
-              <a:t>›  Very different codebases (languages, arch)</a:t>
+              <a:t>›  Copies are expected to diverge</a:t>
             </a:r>
           </a:p>
         </p:txBody>
@@ -6844,7 +6844,7 @@
               </a:defRPr>
             </a:pPr>
             <a:r>
-              <a:t>›  Completely independent teams</a:t>
+              <a:t>›  Very different apps (costly to generalize)</a:t>
             </a:r>
           </a:p>
         </p:txBody>
@@ -6878,7 +6878,7 @@
               </a:defRPr>
             </a:pPr>
             <a:r>
-              <a:t>›  Rapid prototype or MVP</a:t>
+              <a:t>›  Prototype or MVP</a:t>
             </a:r>
           </a:p>
         </p:txBody>
@@ -6912,7 +6912,7 @@
               </a:defRPr>
             </a:pPr>
             <a:r>
-              <a:t>›  No need for UX consistency</a:t>
+              <a:t>›  Teams can't coordinate releases</a:t>
             </a:r>
           </a:p>
         </p:txBody>
@@ -7383,7 +7383,7 @@
               </a:defRPr>
             </a:pPr>
             <a:r>
-              <a:t>When developing a feature for multiple codebases: is it better to share code or duplicate it?</a:t>
+              <a:t>When a feature must exist in several apps: build it once in a shared library, or copy it into each app?</a:t>
             </a:r>
           </a:p>
         </p:txBody>
@@ -7503,7 +7503,7 @@
               </a:defRPr>
             </a:pPr>
             <a:r>
-              <a:t>Real financial impact</a:t>
+              <a:t>Every cost scales with the feature</a:t>
             </a:r>
           </a:p>
         </p:txBody>
@@ -7537,7 +7537,7 @@
               </a:defRPr>
             </a:pPr>
             <a:r>
-              <a:t>Maintenance represents 50-80% of total software cost. The initial choice has a massive long-term effect.</a:t>
+              <a:t>Each cost is a share of the build cost (person-hours × loaded rate). The hourly rate never flips the verdict.</a:t>
             </a:r>
           </a:p>
         </p:txBody>
@@ -7691,7 +7691,7 @@
               </a:defRPr>
             </a:pPr>
             <a:r>
-              <a:t>Each approach has its strengths. The analysis quantifies costs to enable an informed decision.</a:t>
+              <a:t>Feature size, number of apps and horizon decide. Either option can win; the analysis shows where the line is.</a:t>
             </a:r>
           </a:p>
         </p:txBody>
@@ -7811,7 +7811,7 @@
               </a:defRPr>
             </a:pPr>
             <a:r>
-              <a:t>Data-backed</a:t>
+              <a:t>Sourced, with limits</a:t>
             </a:r>
           </a:p>
         </p:txBody>
@@ -7845,7 +7845,7 @@
               </a:defRPr>
             </a:pPr>
             <a:r>
-              <a:t>Based on recognized models (COCOMO II), IEEE studies, and France 2025-2026 salary data.</a:t>
+              <a:t>COCOMO II reuse model, Krüger &amp; Berger 2020, Ray &amp; Kim 2012, France 2026 labor costs. Assumptions are labelled.</a:t>
             </a:r>
           </a:p>
         </p:txBody>
@@ -7948,7 +7948,7 @@
               </a:defRPr>
             </a:pPr>
             <a:r>
-              <a:t>KEY FINDING</a:t>
+              <a:t>KEY FACT</a:t>
             </a:r>
           </a:p>
         </p:txBody>
@@ -7982,7 +7982,7 @@
               </a:defRPr>
             </a:pPr>
             <a:r>
-              <a:t>Maintenance dominates total cost</a:t>
+              <a:t>Upkeep is a recurring cost</a:t>
             </a:r>
           </a:p>
         </p:txBody>
@@ -8059,7 +8059,7 @@
               </a:defRPr>
             </a:pPr>
             <a:r>
-              <a:t>50-80%</a:t>
+              <a:t>~20%/yr</a:t>
             </a:r>
           </a:p>
         </p:txBody>
@@ -8093,11 +8093,11 @@
               </a:defRPr>
             </a:pPr>
             <a:r>
-              <a:t>of total software cost</a:t>
+              <a:t>of the build cost, per copy,</a:t>
             </a:r>
             <a:br/>
             <a:r>
-              <a:t>is maintenance</a:t>
+              <a:t>to keep a feature alive</a:t>
             </a:r>
           </a:p>
         </p:txBody>
@@ -8131,7 +8131,7 @@
               </a:defRPr>
             </a:pPr>
             <a:r>
-              <a:t>Up to 90% for legacy systems</a:t>
+              <a:t>Order of magnitude: DoD rule, Glass 60/60</a:t>
             </a:r>
           </a:p>
         </p:txBody>
@@ -8208,7 +8208,7 @@
               </a:defRPr>
             </a:pPr>
             <a:r>
-              <a:t>5-year breakdown</a:t>
+              <a:t>5-year cost, one app</a:t>
             </a:r>
           </a:p>
         </p:txBody>
@@ -8242,7 +8242,7 @@
               </a:defRPr>
             </a:pPr>
             <a:r>
-              <a:t>Initial development</a:t>
+              <a:t>Build</a:t>
             </a:r>
           </a:p>
         </p:txBody>
@@ -8276,7 +8276,7 @@
               </a:defRPr>
             </a:pPr>
             <a:r>
-              <a:t>~21% of total cost</a:t>
+              <a:t>€45,360 (50%)</a:t>
             </a:r>
           </a:p>
         </p:txBody>
@@ -8310,7 +8310,7 @@
               </a:defRPr>
             </a:pPr>
             <a:r>
-              <a:t>Maintenance &amp; evolution</a:t>
+              <a:t>Upkeep (5 × 20%)</a:t>
             </a:r>
           </a:p>
         </p:txBody>
@@ -8344,7 +8344,7 @@
               </a:defRPr>
             </a:pPr>
             <a:r>
-              <a:t>~79% of total cost</a:t>
+              <a:t>€45,360 (50%)</a:t>
             </a:r>
           </a:p>
         </p:txBody>
@@ -8378,7 +8378,7 @@
               </a:defRPr>
             </a:pPr>
             <a:r>
-              <a:t>The shared vs duplicated choice primarily impacts the 79% maintenance portion</a:t>
+              <a:t>The choice plays out in the upkeep of the extra copies</a:t>
             </a:r>
           </a:p>
         </p:txBody>
@@ -8455,7 +8455,7 @@
               </a:defRPr>
             </a:pPr>
             <a:r>
-              <a:t>Conclusion: optimizing initial development matters less than optimizing maintenance</a:t>
+              <a:t>Bugs aren't priced separately: fixing them is part of upkeep (no reliable data to do more)</a:t>
             </a:r>
           </a:p>
         </p:txBody>
@@ -8592,7 +8592,7 @@
               </a:defRPr>
             </a:pPr>
             <a:r>
-              <a:t>The upfront investment</a:t>
+              <a:t>Up-front: roughly equal for 2 apps</a:t>
             </a:r>
           </a:p>
         </p:txBody>
@@ -8746,7 +8746,7 @@
               </a:defRPr>
             </a:pPr>
             <a:r>
-              <a:t>›  Initial dev + generalization overhead: +30%</a:t>
+              <a:t>›  Build it made to share: ×1.2 (€54,432)</a:t>
             </a:r>
           </a:p>
         </p:txBody>
@@ -8780,7 +8780,7 @@
               </a:defRPr>
             </a:pPr>
             <a:r>
-              <a:t>›  Library infrastructure setup: 5-11 weeks</a:t>
+              <a:t>›  Plug into the other app: 20% (€9,072)</a:t>
             </a:r>
           </a:p>
         </p:txBody>
@@ -8814,7 +8814,7 @@
               </a:defRPr>
             </a:pPr>
             <a:r>
-              <a:t>›  CI/CD, documentation, versioning</a:t>
+              <a:t>›  New library setup: 280 h (€11,340)</a:t>
             </a:r>
           </a:p>
         </p:txBody>
@@ -8848,7 +8848,7 @@
               </a:defRPr>
             </a:pPr>
             <a:r>
-              <a:t>›  Total setup: ~€52,000</a:t>
+              <a:t>›  Total up-front: €74,844</a:t>
             </a:r>
           </a:p>
         </p:txBody>
@@ -8882,7 +8882,7 @@
               </a:defRPr>
             </a:pPr>
             <a:r>
-              <a:t>›  Higher one-time investment</a:t>
+              <a:t>›  €63,504 if the library already exists</a:t>
             </a:r>
           </a:p>
         </p:txBody>
@@ -9036,7 +9036,7 @@
               </a:defRPr>
             </a:pPr>
             <a:r>
-              <a:t>›  Dev codebase A: baseline cost</a:t>
+              <a:t>›  Build for the first app: €45,360</a:t>
             </a:r>
           </a:p>
         </p:txBody>
@@ -9070,7 +9070,7 @@
               </a:defRPr>
             </a:pPr>
             <a:r>
-              <a:t>›  Porting to codebase B: +50-80%</a:t>
+              <a:t>›  Copy-adapt into the other: 65% (€29,484)</a:t>
             </a:r>
           </a:p>
         </p:txBody>
@@ -9104,7 +9104,7 @@
               </a:defRPr>
             </a:pPr>
             <a:r>
-              <a:t>›  Design adaptation, doubled tests</a:t>
+              <a:t>›  Adapt to its conventions, its own tests</a:t>
             </a:r>
           </a:p>
         </p:txBody>
@@ -9138,7 +9138,7 @@
               </a:defRPr>
             </a:pPr>
             <a:r>
-              <a:t>›  Total setup: ~€43,000</a:t>
+              <a:t>›  Total up-front: €74,844</a:t>
             </a:r>
           </a:p>
         </p:txBody>
@@ -9172,7 +9172,7 @@
               </a:defRPr>
             </a:pPr>
             <a:r>
-              <a:t>›  Cheaper in the short term</a:t>
+              <a:t>›  Same as sharing for 2 apps</a:t>
             </a:r>
           </a:p>
         </p:txBody>
@@ -9249,7 +9249,7 @@
               </a:defRPr>
             </a:pPr>
             <a:r>
-              <a:t>Duplication seems ~20% cheaper upfront — but it's a mirage</a:t>
+              <a:t>Copying is not cheaper up front — the recurring upkeep of the extra copies decides</a:t>
             </a:r>
           </a:p>
         </p:txBody>
@@ -9352,7 +9352,7 @@
               </a:defRPr>
             </a:pPr>
             <a:r>
-              <a:t>MAINTENANCE</a:t>
+              <a:t>UPKEEP</a:t>
             </a:r>
           </a:p>
         </p:txBody>
@@ -9386,7 +9386,7 @@
               </a:defRPr>
             </a:pPr>
             <a:r>
-              <a:t>The trap: accelerating costs</a:t>
+              <a:t>What decides: upkeep of the extra copies</a:t>
             </a:r>
           </a:p>
         </p:txBody>
@@ -9506,7 +9506,7 @@
               </a:defRPr>
             </a:pPr>
             <a:r>
-              <a:t>Double maintenance</a:t>
+              <a:t>Every copy is maintained</a:t>
             </a:r>
           </a:p>
         </p:txBody>
@@ -9540,7 +9540,7 @@
               </a:defRPr>
             </a:pPr>
             <a:r>
-              <a:t>1.8x → 2.0x</a:t>
+              <a:t>1.0×</a:t>
             </a:r>
           </a:p>
         </p:txBody>
@@ -9574,7 +9574,7 @@
               </a:defRPr>
             </a:pPr>
             <a:r>
-              <a:t>Every bug, every evolution, every test must be done twice. The factor increases yearly (+0.05/yr) as copies diverge.</a:t>
+              <a:t>An extra copy costs about as much yearly upkeep as the first (20% of build), sync and repeated fixes included. Ray &amp; Kim: 11–16% of changes get ported between forks.</a:t>
             </a:r>
           </a:p>
         </p:txBody>
@@ -9694,7 +9694,7 @@
               </a:defRPr>
             </a:pPr>
             <a:r>
-              <a:t>Growing synchronization</a:t>
+              <a:t>Copies drift</a:t>
             </a:r>
           </a:p>
         </p:txBody>
@@ -9728,7 +9728,7 @@
               </a:defRPr>
             </a:pPr>
             <a:r>
-              <a:t>+20%/yr</a:t>
+              <a:t>+0.05/yr</a:t>
             </a:r>
           </a:p>
         </p:txBody>
@@ -9762,7 +9762,7 @@
               </a:defRPr>
             </a:pPr>
             <a:r>
-              <a:t>Sync cost grows exponentially. Year 1: ~€10K, Year 3: ~€14K, Year 5: ~€23K. Snowball effect.</a:t>
+              <a:t>Assumption, no data: extra-copy upkeep grows 0.05 a year, capped at 1.5×. Not exponential: copies that diverge too far stop being synced.</a:t>
             </a:r>
           </a:p>
         </p:txBody>
@@ -9882,7 +9882,7 @@
               </a:defRPr>
             </a:pPr>
             <a:r>
-              <a:t>Propagated bugs</a:t>
+              <a:t>Sharing has upkeep too</a:t>
             </a:r>
           </a:p>
         </p:txBody>
@@ -9916,7 +9916,7 @@
               </a:defRPr>
             </a:pPr>
             <a:r>
-              <a:t>33%</a:t>
+              <a:t>4%/yr</a:t>
             </a:r>
           </a:p>
         </p:txBody>
@@ -9950,7 +9950,7 @@
               </a:defRPr>
             </a:pPr>
             <a:r>
-              <a:t>IEEE study: 1/3 of bugs fixed in a clone are never fixed in the other copy. Estimated cost: ~€50K/yr.</a:t>
+              <a:t>Per extra app: coordination and breaking-change upgrades (order of magnitude). Plus 24%/yr upkeep of the bigger shared code and 100 h/yr to run a new library.</a:t>
             </a:r>
           </a:p>
         </p:txBody>
@@ -10027,7 +10027,7 @@
               </a:defRPr>
             </a:pPr>
             <a:r>
-              <a:t>Duplication is only viable for short-lived features</a:t>
+              <a:t>Reference case: sharing €16,750/yr vs duplication €18,144 → €19,958/yr, paid every year</a:t>
             </a:r>
           </a:p>
         </p:txBody>
@@ -10130,7 +10130,7 @@
               </a:defRPr>
             </a:pPr>
             <a:r>
-              <a:t>3-YEAR PROJECTION</a:t>
+              <a:t>5-YEAR PROJECTION</a:t>
             </a:r>
           </a:p>
         </p:txBody>
@@ -10164,7 +10164,7 @@
               </a:defRPr>
             </a:pPr>
             <a:r>
-              <a:t>Cost comparison (France context)</a:t>
+              <a:t>Reference scenario (France 2026)</a:t>
             </a:r>
           </a:p>
         </p:txBody>
@@ -10469,7 +10469,7 @@
               </a:defRPr>
             </a:pPr>
             <a:r>
-              <a:t>Year 2</a:t>
+              <a:t>Year 3</a:t>
             </a:r>
           </a:p>
         </p:txBody>
@@ -10546,7 +10546,7 @@
               </a:defRPr>
             </a:pPr>
             <a:r>
-              <a:t>Year 3</a:t>
+              <a:t>Year 5</a:t>
             </a:r>
           </a:p>
         </p:txBody>
@@ -10743,7 +10743,7 @@
               </a:defRPr>
             </a:pPr>
             <a:r>
-              <a:t>€52,000</a:t>
+              <a:t>€74,844</a:t>
             </a:r>
           </a:p>
         </p:txBody>
@@ -10820,7 +10820,7 @@
               </a:defRPr>
             </a:pPr>
             <a:r>
-              <a:t>€119,000</a:t>
+              <a:t>€91,595</a:t>
             </a:r>
           </a:p>
         </p:txBody>
@@ -10897,7 +10897,7 @@
               </a:defRPr>
             </a:pPr>
             <a:r>
-              <a:t>€186,000</a:t>
+              <a:t>€125,096</a:t>
             </a:r>
           </a:p>
         </p:txBody>
@@ -10974,7 +10974,7 @@
               </a:defRPr>
             </a:pPr>
             <a:r>
-              <a:t>€253,000</a:t>
+              <a:t>€158,598</a:t>
             </a:r>
           </a:p>
         </p:txBody>
@@ -11171,7 +11171,7 @@
               </a:defRPr>
             </a:pPr>
             <a:r>
-              <a:t>€43,000</a:t>
+              <a:t>€74,844</a:t>
             </a:r>
           </a:p>
         </p:txBody>
@@ -11248,7 +11248,7 @@
               </a:defRPr>
             </a:pPr>
             <a:r>
-              <a:t>€114,000</a:t>
+              <a:t>€92,988</a:t>
             </a:r>
           </a:p>
         </p:txBody>
@@ -11325,7 +11325,7 @@
               </a:defRPr>
             </a:pPr>
             <a:r>
-              <a:t>€187,000</a:t>
+              <a:t>€130,637</a:t>
             </a:r>
           </a:p>
         </p:txBody>
@@ -11402,7 +11402,7 @@
               </a:defRPr>
             </a:pPr>
             <a:r>
-              <a:t>€263,000</a:t>
+              <a:t>€170,100</a:t>
             </a:r>
           </a:p>
         </p:txBody>
@@ -11470,7 +11470,7 @@
               </a:defRPr>
             </a:pPr>
             <a:r>
-              <a:t>›  Shared code costs +€9,000 more at year 0 (setup investment)</a:t>
+              <a:t>›  Year 0: same up-front cost (1,120 h feature, team at €40.50/h, 2 apps, new library)</a:t>
             </a:r>
           </a:p>
         </p:txBody>
@@ -11504,7 +11504,7 @@
               </a:defRPr>
             </a:pPr>
             <a:r>
-              <a:t>›  By year 1, cumulative costs are nearly identical</a:t>
+              <a:t>›  Sharing is never more expensive, so it pays off from day one</a:t>
             </a:r>
           </a:p>
         </p:txBody>
@@ -11538,7 +11538,7 @@
               </a:defRPr>
             </a:pPr>
             <a:r>
-              <a:t>›  From year 2 on, duplication becomes more expensive</a:t>
+              <a:t>›  Year 5: duplication costs €11,502 more (7%) — €43,092 more if the library already exists</a:t>
             </a:r>
           </a:p>
         </p:txBody>
@@ -11572,7 +11572,7 @@
               </a:defRPr>
             </a:pPr>
             <a:r>
-              <a:t>›  Year 3: duplication costs ~€10,000 more — and the gap accelerates</a:t>
+              <a:t>›  Thin margin for 2 apps: generalization G ≥ 1.33 or extra-copy upkeep e0 ≤ 0.75 flips the verdict</a:t>
             </a:r>
           </a:p>
         </p:txBody>
@@ -11675,7 +11675,7 @@
               </a:defRPr>
             </a:pPr>
             <a:r>
-              <a:t>CROSSOVER POINT</a:t>
+              <a:t>BREAK-EVEN</a:t>
             </a:r>
           </a:p>
         </p:txBody>
@@ -11709,7 +11709,7 @@
               </a:defRPr>
             </a:pPr>
             <a:r>
-              <a:t>When sharing becomes profitable</a:t>
+              <a:t>Read from the same cost curves</a:t>
             </a:r>
           </a:p>
         </p:txBody>
@@ -11786,7 +11786,7 @@
               </a:defRPr>
             </a:pPr>
             <a:r>
-              <a:t>6 to 18 months</a:t>
+              <a:t>Month 0</a:t>
             </a:r>
           </a:p>
         </p:txBody>
@@ -11820,11 +11820,11 @@
               </a:defRPr>
             </a:pPr>
             <a:r>
-              <a:t>Typical break-even</a:t>
+              <a:t>Break-even in the</a:t>
             </a:r>
             <a:br/>
             <a:r>
-              <a:t>for the shared code approach</a:t>
+              <a:t>reference scenario</a:t>
             </a:r>
           </a:p>
         </p:txBody>
@@ -11901,7 +11901,7 @@
               </a:defRPr>
             </a:pPr>
             <a:r>
-              <a:t>In our example</a:t>
+              <a:t>Small feature (140 h, new library)</a:t>
             </a:r>
           </a:p>
         </p:txBody>
@@ -11935,7 +11935,7 @@
               </a:defRPr>
             </a:pPr>
             <a:r>
-              <a:t>~18 months</a:t>
+              <a:t>Never</a:t>
             </a:r>
           </a:p>
         </p:txBody>
@@ -11969,15 +11969,15 @@
               </a:defRPr>
             </a:pPr>
             <a:r>
-              <a:t>The initial €26,000 premium is</a:t>
+              <a:t>Over 5 years, sharing costs</a:t>
             </a:r>
             <a:br/>
             <a:r>
-              <a:t>recovered through monthly savings</a:t>
+              <a:t>2.2× more than copying</a:t>
             </a:r>
             <a:br/>
             <a:r>
-              <a:t>of ~€1,400/month</a:t>
+              <a:t>(€47,466 vs €21,263)</a:t>
             </a:r>
           </a:p>
         </p:txBody>
@@ -12097,7 +12097,7 @@
               </a:defRPr>
             </a:pPr>
             <a:r>
-              <a:t>Shortens break-even</a:t>
+              <a:t>Favours sharing</a:t>
             </a:r>
           </a:p>
         </p:txBody>
@@ -12131,7 +12131,7 @@
               </a:defRPr>
             </a:pPr>
             <a:r>
-              <a:t>›  Large feature</a:t>
+              <a:t>›  Large feature (&gt; ~820 h for 2 apps)</a:t>
             </a:r>
           </a:p>
         </p:txBody>
@@ -12165,7 +12165,7 @@
               </a:defRPr>
             </a:pPr>
             <a:r>
-              <a:t>›  Frequent evolutions</a:t>
+              <a:t>›  3+ apps (threshold drops to ~340 h)</a:t>
             </a:r>
           </a:p>
         </p:txBody>
@@ -12199,7 +12199,7 @@
               </a:defRPr>
             </a:pPr>
             <a:r>
-              <a:t>›  Frequent bugs in production</a:t>
+              <a:t>›  A shared library already exists</a:t>
             </a:r>
           </a:p>
         </p:txBody>
@@ -12233,7 +12233,7 @@
               </a:defRPr>
             </a:pPr>
             <a:r>
-              <a:t>›  3+ consumer codebases</a:t>
+              <a:t>›  Long horizon</a:t>
             </a:r>
           </a:p>
         </p:txBody>
@@ -12353,7 +12353,7 @@
               </a:defRPr>
             </a:pPr>
             <a:r>
-              <a:t>Lengthens break-even</a:t>
+              <a:t>Favours copying</a:t>
             </a:r>
           </a:p>
         </p:txBody>
@@ -12387,7 +12387,7 @@
               </a:defRPr>
             </a:pPr>
             <a:r>
-              <a:t>›  Small and stable feature</a:t>
+              <a:t>›  Small feature needing a new library</a:t>
             </a:r>
           </a:p>
         </p:txBody>
@@ -12421,7 +12421,7 @@
               </a:defRPr>
             </a:pPr>
             <a:r>
-              <a:t>›  Very costly coordination</a:t>
+              <a:t>›  Short horizon (1 year: needs &gt; ~1,030 h)</a:t>
             </a:r>
           </a:p>
         </p:txBody>
@@ -12455,7 +12455,7 @@
               </a:defRPr>
             </a:pPr>
             <a:r>
-              <a:t>›  Very different codebases</a:t>
+              <a:t>›  Cheap copies, or costly generalization</a:t>
             </a:r>
           </a:p>
         </p:txBody>
@@ -12489,7 +12489,7 @@
               </a:defRPr>
             </a:pPr>
             <a:r>
-              <a:t>›  End-of-life feature</a:t>
+              <a:t>›  Copies meant to diverge</a:t>
             </a:r>
           </a:p>
         </p:txBody>
@@ -12626,7 +12626,7 @@
               </a:defRPr>
             </a:pPr>
             <a:r>
-              <a:t>The more you scale, the more sharing wins</a:t>
+              <a:t>The more apps, the more sharing wins</a:t>
             </a:r>
           </a:p>
         </p:txBody>
@@ -12703,7 +12703,7 @@
               </a:defRPr>
             </a:pPr>
             <a:r>
-              <a:t>2 codebases</a:t>
+              <a:t>2 apps</a:t>
             </a:r>
           </a:p>
         </p:txBody>
@@ -12737,7 +12737,7 @@
               </a:defRPr>
             </a:pPr>
             <a:r>
-              <a:t>1.04x</a:t>
+              <a:t>1.07x</a:t>
             </a:r>
           </a:p>
         </p:txBody>
@@ -12805,11 +12805,11 @@
               </a:defRPr>
             </a:pPr>
             <a:r>
-              <a:t>Nearly equivalent</a:t>
+              <a:t>Sharing saves</a:t>
             </a:r>
             <a:br/>
             <a:r>
-              <a:t>over 3 years</a:t>
+              <a:t>~€11,500 over 5 years</a:t>
             </a:r>
           </a:p>
         </p:txBody>
@@ -12886,7 +12886,7 @@
               </a:defRPr>
             </a:pPr>
             <a:r>
-              <a:t>3 codebases</a:t>
+              <a:t>3 apps</a:t>
             </a:r>
           </a:p>
         </p:txBody>
@@ -12920,7 +12920,7 @@
               </a:defRPr>
             </a:pPr>
             <a:r>
-              <a:t>1.56x</a:t>
+              <a:t>1.41x</a:t>
             </a:r>
           </a:p>
         </p:txBody>
@@ -12992,7 +12992,7 @@
             </a:r>
             <a:br/>
             <a:r>
-              <a:t>~€160,000 over 3 years</a:t>
+              <a:t>~€72,700 over 5 years</a:t>
             </a:r>
           </a:p>
         </p:txBody>
@@ -13069,7 +13069,7 @@
               </a:defRPr>
             </a:pPr>
             <a:r>
-              <a:t>5 codebases</a:t>
+              <a:t>5 apps</a:t>
             </a:r>
           </a:p>
         </p:txBody>
@@ -13103,7 +13103,7 @@
               </a:defRPr>
             </a:pPr>
             <a:r>
-              <a:t>2.47x</a:t>
+              <a:t>1.92x</a:t>
             </a:r>
           </a:p>
         </p:txBody>
@@ -13171,11 +13171,11 @@
               </a:defRPr>
             </a:pPr>
             <a:r>
-              <a:t>Duplication costs</a:t>
+              <a:t>Sharing saves</a:t>
             </a:r>
             <a:br/>
             <a:r>
-              <a:t>2.5x more</a:t>
+              <a:t>~€195,200 over 5 years</a:t>
             </a:r>
           </a:p>
         </p:txBody>
@@ -13286,7 +13286,7 @@
               </a:defRPr>
             </a:pPr>
             <a:r>
-              <a:t>With duplicated code, each new codebase multiplies costs nearly linearly. With shared code, the marginal cost of each new consumer is minimal (~5-10% of porting cost).</a:t>
+              <a:t>Each extra copy costs 65% of the build up front, then a full share of upkeep every year (rising as it drifts). Each extra app on a shared library costs 20% up front, then 4%/yr.</a:t>
             </a:r>
           </a:p>
         </p:txBody>
@@ -13389,7 +13389,7 @@
               </a:defRPr>
             </a:pPr>
             <a:r>
-              <a:t>ORGANIZATIONAL IMPACT</a:t>
+              <a:t>COUNTER-EVIDENCE</a:t>
             </a:r>
           </a:p>
         </p:txBody>
@@ -13423,7 +13423,7 @@
               </a:defRPr>
             </a:pPr>
             <a:r>
-              <a:t>Beyond code: the impact on the team</a:t>
+              <a:t>What the numbers don't say</a:t>
             </a:r>
           </a:p>
         </p:txBody>
@@ -13543,7 +13543,7 @@
               </a:defRPr>
             </a:pPr>
             <a:r>
-              <a:t>Onboarding</a:t>
+              <a:t>Clones are often harmless</a:t>
             </a:r>
           </a:p>
         </p:txBody>
@@ -13577,15 +13577,15 @@
               </a:defRPr>
             </a:pPr>
             <a:r>
-              <a:t>Shared code: 1 source to learn</a:t>
+              <a:t>Up to 71% of clones judged beneficial</a:t>
             </a:r>
             <a:br/>
             <a:r>
-              <a:t>Duplicated: N sources + their differences</a:t>
+              <a:t>Clones not more defect-prone (Rahman 2012)</a:t>
             </a:r>
             <a:br/>
             <a:r>
-              <a:t>→ +1-2 weeks of onboarding with duplication</a:t>
+              <a:t>→ Not every copy is a liability</a:t>
             </a:r>
           </a:p>
         </p:txBody>
@@ -13705,7 +13705,7 @@
               </a:defRPr>
             </a:pPr>
             <a:r>
-              <a:t>QA / Testing</a:t>
+              <a:t>The wrong abstraction</a:t>
             </a:r>
           </a:p>
         </p:txBody>
@@ -13739,15 +13739,15 @@
               </a:defRPr>
             </a:pPr>
             <a:r>
-              <a:t>Duplication = double testing effort</a:t>
+              <a:t>“Duplication is far cheaper than the</a:t>
             </a:r>
             <a:br/>
             <a:r>
-              <a:t>QA = 20-30% of dev effort (standard)</a:t>
+              <a:t>wrong abstraction” (Sandi Metz)</a:t>
             </a:r>
             <a:br/>
             <a:r>
-              <a:t>→ Doubled with duplication, not with sharing</a:t>
+              <a:t>→ Copies meant to diverge are not a cost</a:t>
             </a:r>
           </a:p>
         </p:txBody>
@@ -13867,7 +13867,7 @@
               </a:defRPr>
             </a:pPr>
             <a:r>
-              <a:t>Product Management</a:t>
+              <a:t>Breaking changes</a:t>
             </a:r>
           </a:p>
         </p:txBody>
@@ -13901,15 +13901,15 @@
               </a:defRPr>
             </a:pPr>
             <a:r>
-              <a:t>Shared: 1 unified backlog</a:t>
+              <a:t>14.8% of API changes break (Xavier 2017)</a:t>
             </a:r>
             <a:br/>
             <a:r>
-              <a:t>Duplicated: 2 backlogs to coordinate</a:t>
+              <a:t>81.5% of systems keep old deps (Kula 2018)</a:t>
             </a:r>
             <a:br/>
             <a:r>
-              <a:t>→ Incident management 1.5-2x more costly</a:t>
+              <a:t>→ Priced only roughly: 4%/yr per app</a:t>
             </a:r>
           </a:p>
         </p:txBody>
@@ -14029,7 +14029,7 @@
               </a:defRPr>
             </a:pPr>
             <a:r>
-              <a:t>UX Consistency</a:t>
+              <a:t>Not in the model</a:t>
             </a:r>
           </a:p>
         </p:txBody>
@@ -14063,15 +14063,15 @@
               </a:defRPr>
             </a:pPr>
             <a:r>
-              <a:t>Shared: guaranteed by the code</a:t>
+              <a:t>Time to market, release bottleneck</a:t>
             </a:r>
             <a:br/>
             <a:r>
-              <a:t>Duplicated: progressive degradation</a:t>
+              <a:t>UX consistency, intended divergence</a:t>
             </a:r>
             <a:br/>
             <a:r>
-              <a:t>→ Copies inevitably diverge</a:t>
+              <a:t>→ No discounting (NPV) either</a:t>
             </a:r>
           </a:p>
         </p:txBody>

--- a/docs/Feature-Cost-Shared-vs-Duplicated.pptx
+++ b/docs/Feature-Cost-Shared-vs-Duplicated.pptx
@@ -10027,7 +10027,7 @@
               </a:defRPr>
             </a:pPr>
             <a:r>
-              <a:t>Reference case: sharing €16,750/yr vs duplication €18,144 → €19,958/yr, paid every year</a:t>
+              <a:t>Reference case: sharing €16,751/yr vs duplication €18,144 → €19,958/yr, paid every year</a:t>
             </a:r>
           </a:p>
         </p:txBody>
@@ -11504,7 +11504,7 @@
               </a:defRPr>
             </a:pPr>
             <a:r>
-              <a:t>›  Sharing is never more expensive, so it pays off from day one</a:t>
+              <a:t>›  Sharing is never more expensive, so it pays off from the start</a:t>
             </a:r>
           </a:p>
         </p:txBody>
@@ -11572,7 +11572,7 @@
               </a:defRPr>
             </a:pPr>
             <a:r>
-              <a:t>›  Thin margin for 2 apps: generalization G ≥ 1.33 or extra-copy upkeep e0 ≤ 0.75 flips the verdict</a:t>
+              <a:t>›  Thin margin for 2 apps: generalization G ≥ 1.33 or extra-copy upkeep e0 &lt; 0.75 flips the verdict</a:t>
             </a:r>
           </a:p>
         </p:txBody>
